--- a/docs/ARI_presentation.pptx
+++ b/docs/ARI_presentation.pptx
@@ -12,6 +12,7 @@
     <p:sldId id="260" r:id="rId6"/>
     <p:sldId id="261" r:id="rId7"/>
     <p:sldId id="262" r:id="rId8"/>
+    <p:sldId id="270" r:id="rId21"/>
     <p:sldId id="263" r:id="rId9"/>
     <p:sldId id="264" r:id="rId10"/>
     <p:sldId id="265" r:id="rId11"/>
@@ -691,7 +692,7 @@
           <a:p>
             <a:r>
               <a:rPr lang="en-US" dirty="0"/>
-              <a:t>המספר עצמו לא מרשים אף אחד. מה שחשוב זה שהבדיקות מכסות את מה שיקר לטעות בו: נוסחאות, הרשאות וזמן.</a:t>
+              <a:t>המספר עצמו לא מרשים אף אחד. מה שחשוב זה שהבדיקות מכסות את מה שיקר לטעות בו: נוסחאות, הרשאות וזמן. ואם שואלים על הכרטיס הרביעי — זה הסיפור הכי טוב שיש לי: חיפשתי מחלקה של טעות במקום באג בודד, ומצאתי תשע. החמורה: הכותרת אמרה 4 שבועות מעל שאילתה שהגבילה מספר שורות ולא טווח תאריכים, ליד גרף שהציג ארבעה שבועות באמת. והמסקנה חשובה מהתיקון — כל התשע היו בחשבון שנכתב ישר בתוך עמוד, ואף מודול עם בדיקות לא נכשל.</a:t>
             </a:r>
             <a:endParaRPr lang="en-US" dirty="0"/>
           </a:p>
@@ -2419,7 +2420,7 @@
                 <a:ea typeface="Arial" pitchFamily="34" charset="-122"/>
                 <a:cs typeface="Arial" pitchFamily="34" charset="-120"/>
               </a:rPr>
-              <a:t>554</a:t>
+              <a:t>809</a:t>
             </a:r>
             <a:endParaRPr lang="en-US" sz="3800" dirty="0"/>
           </a:p>
@@ -2524,7 +2525,7 @@
                 <a:ea typeface="Arial" pitchFamily="34" charset="-122"/>
                 <a:cs typeface="Arial" pitchFamily="34" charset="-120"/>
               </a:rPr>
-              <a:t>38</a:t>
+              <a:t>39</a:t>
             </a:r>
             <a:endParaRPr lang="en-US" sz="3800" dirty="0"/>
           </a:p>
@@ -3853,7 +3854,7 @@
                 <a:ea typeface="Arial" pitchFamily="34" charset="-122"/>
                 <a:cs typeface="Arial" pitchFamily="34" charset="-120"/>
               </a:rPr>
-              <a:t>554</a:t>
+              <a:t>809</a:t>
             </a:r>
             <a:endParaRPr lang="en-US" sz="3800" dirty="0"/>
           </a:p>
@@ -3958,7 +3959,7 @@
                 <a:ea typeface="Arial" pitchFamily="34" charset="-122"/>
                 <a:cs typeface="Arial" pitchFamily="34" charset="-120"/>
               </a:rPr>
-              <a:t>37</a:t>
+              <a:t>54</a:t>
             </a:r>
             <a:endParaRPr lang="en-US" sz="3800" dirty="0"/>
           </a:p>
@@ -4739,7 +4740,7 @@
                 <a:ea typeface="Arial" pitchFamily="34" charset="-122"/>
                 <a:cs typeface="Arial" pitchFamily="34" charset="-120"/>
               </a:rPr>
-              <a:t>רגרסיה</a:t>
+              <a:t>ביקורת חישוב</a:t>
             </a:r>
             <a:endParaRPr lang="en-US" sz="1450" dirty="0"/>
           </a:p>
@@ -4778,7 +4779,7 @@
                 <a:ea typeface="Calibri" pitchFamily="34" charset="-122"/>
                 <a:cs typeface="Calibri" pitchFamily="34" charset="-120"/>
               </a:rPr>
-              <a:t>כל באג שנמצא בבדיקה ידנית קיבל בדיקה משלו לפני התיקון, כדי שלא יחזור.</a:t>
+              <a:t>סבב שני חיפש מחלקה של טעות ולא באג בודד — ממוצע של ממוצעים, קצב שממוצע כאילו אינו הופכי. נמצאו תשע, וכולן היו בקוד שנכתב מחוץ למודולים הנבדקים.</a:t>
             </a:r>
             <a:endParaRPr lang="en-US" sz="1300" dirty="0"/>
           </a:p>
@@ -6719,6 +6720,766 @@
 </p:sld>
 </file>
 
+<file path=ppt/slides/slide15.xml><?xml version="1.0" encoding="utf-8"?>
+<p:sld xmlns:a="http://schemas.openxmlformats.org/drawingml/2006/main" xmlns:r="http://schemas.openxmlformats.org/officeDocument/2006/relationships" xmlns:p="http://schemas.openxmlformats.org/presentationml/2006/main">
+  <p:cSld name="Slide 7">
+    <p:bg>
+      <p:bgPr>
+        <a:solidFill>
+          <a:srgbClr val="0A0C10"/>
+        </a:solidFill>
+      </p:bgPr>
+    </p:bg>
+    <p:spTree>
+      <p:nvGrpSpPr>
+        <p:cNvPr id="1" name=""/>
+        <p:cNvGrpSpPr/>
+        <p:nvPr/>
+      </p:nvGrpSpPr>
+      <p:grpSpPr>
+        <a:xfrm>
+          <a:off x="0" y="0"/>
+          <a:ext cx="0" cy="0"/>
+          <a:chOff x="0" y="0"/>
+          <a:chExt cx="0" cy="0"/>
+        </a:xfrm>
+      </p:grpSpPr>
+      <p:sp>
+        <p:nvSpPr>
+          <p:cNvPr id="2" name="Text 0"/>
+          <p:cNvSpPr/>
+          <p:nvPr/>
+        </p:nvSpPr>
+        <p:spPr>
+          <a:xfrm>
+            <a:off x="640080" y="411480"/>
+            <a:ext cx="10881360" cy="274320"/>
+          </a:xfrm>
+          <a:prstGeom prst="rect">
+            <a:avLst/>
+          </a:prstGeom>
+          <a:noFill/>
+          <a:ln/>
+        </p:spPr>
+        <p:txBody>
+          <a:bodyPr wrap="square" lIns="0" tIns="0" rIns="0" bIns="0" rtlCol="0" anchor="ctr"/>
+          <a:lstStyle/>
+          <a:p>
+            <a:pPr rtl="1" algn="r" indent="0" marL="0">
+              <a:buNone/>
+            </a:pPr>
+            <a:r>
+              <a:rPr lang="en-US" sz="1200" b="1" spc="200" kern="0" dirty="0">
+                <a:solidFill>
+                  <a:srgbClr val="4E8EF7"/>
+                </a:solidFill>
+                <a:latin typeface="Calibri" pitchFamily="34" charset="0"/>
+                <a:ea typeface="Calibri" pitchFamily="34" charset="-122"/>
+                <a:cs typeface="Calibri" pitchFamily="34" charset="-120"/>
+              </a:rPr>
+              <a:t>האינטליגנציה</a:t>
+            </a:r>
+            <a:endParaRPr lang="en-US" sz="1200" dirty="0"/>
+          </a:p>
+        </p:txBody>
+      </p:sp>
+      <p:sp>
+        <p:nvSpPr>
+          <p:cNvPr id="3" name="Text 1"/>
+          <p:cNvSpPr/>
+          <p:nvPr/>
+        </p:nvSpPr>
+        <p:spPr>
+          <a:xfrm>
+            <a:off x="640080" y="713232"/>
+            <a:ext cx="10881360" cy="777240"/>
+          </a:xfrm>
+          <a:prstGeom prst="rect">
+            <a:avLst/>
+          </a:prstGeom>
+          <a:noFill/>
+          <a:ln/>
+        </p:spPr>
+        <p:txBody>
+          <a:bodyPr wrap="square" lIns="0" tIns="0" rIns="0" bIns="0" rtlCol="0" anchor="ctr"/>
+          <a:lstStyle/>
+          <a:p>
+            <a:pPr rtl="1" algn="r" indent="0" marL="0">
+              <a:buNone/>
+            </a:pPr>
+            <a:r>
+              <a:rPr lang="en-US" sz="3400" b="1" dirty="0">
+                <a:solidFill>
+                  <a:srgbClr val="E9EDF3"/>
+                </a:solidFill>
+                <a:latin typeface="Arial" pitchFamily="34" charset="0"/>
+                <a:ea typeface="Arial" pitchFamily="34" charset="-122"/>
+                <a:cs typeface="Arial" pitchFamily="34" charset="-120"/>
+              </a:rPr>
+              <a:t>התשובות מחושבות, לא מנוסחות</a:t>
+            </a:r>
+            <a:endParaRPr lang="en-US" sz="3400" dirty="0"/>
+          </a:p>
+        </p:txBody>
+      </p:sp>
+      <p:sp>
+        <p:nvSpPr>
+          <p:cNvPr id="6" name="Text 4"/>
+          <p:cNvSpPr/>
+          <p:nvPr/>
+        </p:nvSpPr>
+        <p:spPr>
+          <a:xfrm>
+            <a:off x="640080" y="5943600"/>
+            <a:ext cx="5657088" cy="365760"/>
+          </a:xfrm>
+          <a:prstGeom prst="rect">
+            <a:avLst/>
+          </a:prstGeom>
+          <a:noFill/>
+          <a:ln/>
+        </p:spPr>
+        <p:txBody>
+          <a:bodyPr wrap="square" lIns="0" tIns="0" rIns="0" bIns="0" rtlCol="0" anchor="ctr"/>
+          <a:lstStyle/>
+          <a:p>
+            <a:pPr rtl="1" algn="ctr" indent="0" marL="0">
+              <a:buNone/>
+            </a:pPr>
+            <a:r>
+              <a:rPr lang="en-US" sz="1100" dirty="0">
+                <a:solidFill>
+                  <a:srgbClr val="8792A3"/>
+                </a:solidFill>
+                <a:latin typeface="Calibri" pitchFamily="34" charset="0"/>
+                <a:ea typeface="Calibri" pitchFamily="34" charset="-122"/>
+                <a:cs typeface="Calibri" pitchFamily="34" charset="-120"/>
+              </a:rPr>
+              <a:t>Ask ARI — הרץ בוחר שאלה, והתשובה מורכבת מפונקציות שנבדקו</a:t>
+            </a:r>
+            <a:endParaRPr lang="en-US" sz="1100" dirty="0"/>
+          </a:p>
+        </p:txBody>
+      </p:sp>
+      <p:sp>
+        <p:nvSpPr>
+          <p:cNvPr id="7" name="Shape 5"/>
+          <p:cNvSpPr/>
+          <p:nvPr/>
+        </p:nvSpPr>
+        <p:spPr>
+          <a:xfrm>
+            <a:off x="11119104" y="1984248"/>
+            <a:ext cx="402336" cy="402336"/>
+          </a:xfrm>
+          <a:prstGeom prst="ellipse">
+            <a:avLst/>
+          </a:prstGeom>
+          <a:solidFill>
+            <a:srgbClr val="16233A"/>
+          </a:solidFill>
+          <a:ln w="12700">
+            <a:solidFill>
+              <a:srgbClr val="4E8EF7"/>
+            </a:solidFill>
+            <a:prstDash val="solid"/>
+          </a:ln>
+        </p:spPr>
+      </p:sp>
+      <p:sp>
+        <p:nvSpPr>
+          <p:cNvPr id="8" name="Text 6"/>
+          <p:cNvSpPr/>
+          <p:nvPr/>
+        </p:nvSpPr>
+        <p:spPr>
+          <a:xfrm>
+            <a:off x="11119104" y="1984248"/>
+            <a:ext cx="402336" cy="402336"/>
+          </a:xfrm>
+          <a:prstGeom prst="rect">
+            <a:avLst/>
+          </a:prstGeom>
+          <a:noFill/>
+          <a:ln/>
+        </p:spPr>
+        <p:txBody>
+          <a:bodyPr wrap="square" lIns="0" tIns="0" rIns="0" bIns="0" rtlCol="0" anchor="ctr"/>
+          <a:lstStyle/>
+          <a:p>
+            <a:pPr algn="ctr" indent="0" marL="0">
+              <a:buNone/>
+            </a:pPr>
+            <a:r>
+              <a:rPr lang="en-US" sz="1400" b="1" dirty="0">
+                <a:solidFill>
+                  <a:srgbClr val="4E8EF7"/>
+                </a:solidFill>
+                <a:latin typeface="Arial" pitchFamily="34" charset="0"/>
+                <a:ea typeface="Arial" pitchFamily="34" charset="-122"/>
+                <a:cs typeface="Arial" pitchFamily="34" charset="-120"/>
+              </a:rPr>
+              <a:t>1</a:t>
+            </a:r>
+            <a:endParaRPr lang="en-US" sz="1400" dirty="0"/>
+          </a:p>
+        </p:txBody>
+      </p:sp>
+      <p:sp>
+        <p:nvSpPr>
+          <p:cNvPr id="9" name="Text 7"/>
+          <p:cNvSpPr/>
+          <p:nvPr/>
+        </p:nvSpPr>
+        <p:spPr>
+          <a:xfrm>
+            <a:off x="7040880" y="1965960"/>
+            <a:ext cx="3931920" cy="292608"/>
+          </a:xfrm>
+          <a:prstGeom prst="rect">
+            <a:avLst/>
+          </a:prstGeom>
+          <a:noFill/>
+          <a:ln/>
+        </p:spPr>
+        <p:txBody>
+          <a:bodyPr wrap="square" lIns="0" tIns="0" rIns="0" bIns="0" rtlCol="0" anchor="ctr"/>
+          <a:lstStyle/>
+          <a:p>
+            <a:pPr rtl="1" algn="r" indent="0" marL="0">
+              <a:buNone/>
+            </a:pPr>
+            <a:r>
+              <a:rPr lang="en-US" sz="1500" b="1" dirty="0">
+                <a:solidFill>
+                  <a:srgbClr val="E9EDF3"/>
+                </a:solidFill>
+                <a:latin typeface="Arial" pitchFamily="34" charset="0"/>
+                <a:ea typeface="Arial" pitchFamily="34" charset="-122"/>
+                <a:cs typeface="Arial" pitchFamily="34" charset="-120"/>
+              </a:rPr>
+              <a:t>רשימה, לא תיבת טקסט</a:t>
+            </a:r>
+            <a:endParaRPr lang="en-US" sz="1500" dirty="0"/>
+          </a:p>
+        </p:txBody>
+      </p:sp>
+      <p:sp>
+        <p:nvSpPr>
+          <p:cNvPr id="10" name="Text 8"/>
+          <p:cNvSpPr/>
+          <p:nvPr/>
+        </p:nvSpPr>
+        <p:spPr>
+          <a:xfrm>
+            <a:off x="7040880" y="2295144"/>
+            <a:ext cx="3931920" cy="548640"/>
+          </a:xfrm>
+          <a:prstGeom prst="rect">
+            <a:avLst/>
+          </a:prstGeom>
+          <a:noFill/>
+          <a:ln/>
+        </p:spPr>
+        <p:txBody>
+          <a:bodyPr wrap="square" lIns="0" tIns="0" rIns="0" bIns="0" rtlCol="0" anchor="t"/>
+          <a:lstStyle/>
+          <a:p>
+            <a:pPr rtl="1" algn="r" indent="0" marL="0">
+              <a:lnSpc>
+                <a:spcPts val="1800"/>
+              </a:lnSpc>
+              <a:buNone/>
+            </a:pPr>
+            <a:r>
+              <a:rPr lang="en-US" sz="1250" dirty="0">
+                <a:solidFill>
+                  <a:srgbClr val="A4AEBE"/>
+                </a:solidFill>
+                <a:latin typeface="Calibri" pitchFamily="34" charset="0"/>
+                <a:ea typeface="Calibri" pitchFamily="34" charset="-122"/>
+                <a:cs typeface="Calibri" pitchFamily="34" charset="-120"/>
+              </a:rPr>
+              <a:t>תיבת טקסט מבטיחה "שאל מה שתרצה". כאן מסננים שאלות קיימות, אז כל מה שמוצג נענה</a:t>
+            </a:r>
+            <a:endParaRPr lang="en-US" sz="1250" dirty="0"/>
+          </a:p>
+        </p:txBody>
+      </p:sp>
+      <p:sp>
+        <p:nvSpPr>
+          <p:cNvPr id="11" name="Shape 9"/>
+          <p:cNvSpPr/>
+          <p:nvPr/>
+        </p:nvSpPr>
+        <p:spPr>
+          <a:xfrm>
+            <a:off x="11119104" y="2971800"/>
+            <a:ext cx="402336" cy="402336"/>
+          </a:xfrm>
+          <a:prstGeom prst="ellipse">
+            <a:avLst/>
+          </a:prstGeom>
+          <a:solidFill>
+            <a:srgbClr val="16233A"/>
+          </a:solidFill>
+          <a:ln w="12700">
+            <a:solidFill>
+              <a:srgbClr val="4E8EF7"/>
+            </a:solidFill>
+            <a:prstDash val="solid"/>
+          </a:ln>
+        </p:spPr>
+      </p:sp>
+      <p:sp>
+        <p:nvSpPr>
+          <p:cNvPr id="12" name="Text 10"/>
+          <p:cNvSpPr/>
+          <p:nvPr/>
+        </p:nvSpPr>
+        <p:spPr>
+          <a:xfrm>
+            <a:off x="11119104" y="2971800"/>
+            <a:ext cx="402336" cy="402336"/>
+          </a:xfrm>
+          <a:prstGeom prst="rect">
+            <a:avLst/>
+          </a:prstGeom>
+          <a:noFill/>
+          <a:ln/>
+        </p:spPr>
+        <p:txBody>
+          <a:bodyPr wrap="square" lIns="0" tIns="0" rIns="0" bIns="0" rtlCol="0" anchor="ctr"/>
+          <a:lstStyle/>
+          <a:p>
+            <a:pPr algn="ctr" indent="0" marL="0">
+              <a:buNone/>
+            </a:pPr>
+            <a:r>
+              <a:rPr lang="en-US" sz="1400" b="1" dirty="0">
+                <a:solidFill>
+                  <a:srgbClr val="4E8EF7"/>
+                </a:solidFill>
+                <a:latin typeface="Arial" pitchFamily="34" charset="0"/>
+                <a:ea typeface="Arial" pitchFamily="34" charset="-122"/>
+                <a:cs typeface="Arial" pitchFamily="34" charset="-120"/>
+              </a:rPr>
+              <a:t>2</a:t>
+            </a:r>
+            <a:endParaRPr lang="en-US" sz="1400" dirty="0"/>
+          </a:p>
+        </p:txBody>
+      </p:sp>
+      <p:sp>
+        <p:nvSpPr>
+          <p:cNvPr id="13" name="Text 11"/>
+          <p:cNvSpPr/>
+          <p:nvPr/>
+        </p:nvSpPr>
+        <p:spPr>
+          <a:xfrm>
+            <a:off x="7040880" y="2953512"/>
+            <a:ext cx="3931920" cy="292608"/>
+          </a:xfrm>
+          <a:prstGeom prst="rect">
+            <a:avLst/>
+          </a:prstGeom>
+          <a:noFill/>
+          <a:ln/>
+        </p:spPr>
+        <p:txBody>
+          <a:bodyPr wrap="square" lIns="0" tIns="0" rIns="0" bIns="0" rtlCol="0" anchor="ctr"/>
+          <a:lstStyle/>
+          <a:p>
+            <a:pPr rtl="1" algn="r" indent="0" marL="0">
+              <a:buNone/>
+            </a:pPr>
+            <a:r>
+              <a:rPr lang="en-US" sz="1500" b="1" dirty="0">
+                <a:solidFill>
+                  <a:srgbClr val="E9EDF3"/>
+                </a:solidFill>
+                <a:latin typeface="Arial" pitchFamily="34" charset="0"/>
+                <a:ea typeface="Arial" pitchFamily="34" charset="-122"/>
+                <a:cs typeface="Arial" pitchFamily="34" charset="-120"/>
+              </a:rPr>
+              <a:t>עשר שאלות מהנתונים שלך</a:t>
+            </a:r>
+            <a:endParaRPr lang="en-US" sz="1500" dirty="0"/>
+          </a:p>
+        </p:txBody>
+      </p:sp>
+      <p:sp>
+        <p:nvSpPr>
+          <p:cNvPr id="14" name="Text 12"/>
+          <p:cNvSpPr/>
+          <p:nvPr/>
+        </p:nvSpPr>
+        <p:spPr>
+          <a:xfrm>
+            <a:off x="7040880" y="3282696"/>
+            <a:ext cx="3931920" cy="548640"/>
+          </a:xfrm>
+          <a:prstGeom prst="rect">
+            <a:avLst/>
+          </a:prstGeom>
+          <a:noFill/>
+          <a:ln/>
+        </p:spPr>
+        <p:txBody>
+          <a:bodyPr wrap="square" lIns="0" tIns="0" rIns="0" bIns="0" rtlCol="0" anchor="t"/>
+          <a:lstStyle/>
+          <a:p>
+            <a:pPr rtl="1" algn="r" indent="0" marL="0">
+              <a:lnSpc>
+                <a:spcPts val="1800"/>
+              </a:lnSpc>
+              <a:buNone/>
+            </a:pPr>
+            <a:r>
+              <a:rPr lang="en-US" sz="1250" dirty="0">
+                <a:solidFill>
+                  <a:srgbClr val="A4AEBE"/>
+                </a:solidFill>
+                <a:latin typeface="Calibri" pitchFamily="34" charset="0"/>
+                <a:ea typeface="Calibri" pitchFamily="34" charset="-122"/>
+                <a:cs typeface="Calibri" pitchFamily="34" charset="-120"/>
+              </a:rPr>
+              <a:t>כמה השתפרתי, האם אני מעמיס מהר מדי, האם עמדתי בתוכנית, כמה מהאימון קל</a:t>
+            </a:r>
+            <a:endParaRPr lang="en-US" sz="1250" dirty="0"/>
+          </a:p>
+        </p:txBody>
+      </p:sp>
+      <p:sp>
+        <p:nvSpPr>
+          <p:cNvPr id="15" name="Shape 13"/>
+          <p:cNvSpPr/>
+          <p:nvPr/>
+        </p:nvSpPr>
+        <p:spPr>
+          <a:xfrm>
+            <a:off x="11119104" y="3959352"/>
+            <a:ext cx="402336" cy="402336"/>
+          </a:xfrm>
+          <a:prstGeom prst="ellipse">
+            <a:avLst/>
+          </a:prstGeom>
+          <a:solidFill>
+            <a:srgbClr val="16233A"/>
+          </a:solidFill>
+          <a:ln w="12700">
+            <a:solidFill>
+              <a:srgbClr val="4E8EF7"/>
+            </a:solidFill>
+            <a:prstDash val="solid"/>
+          </a:ln>
+        </p:spPr>
+      </p:sp>
+      <p:sp>
+        <p:nvSpPr>
+          <p:cNvPr id="16" name="Text 14"/>
+          <p:cNvSpPr/>
+          <p:nvPr/>
+        </p:nvSpPr>
+        <p:spPr>
+          <a:xfrm>
+            <a:off x="11119104" y="3959352"/>
+            <a:ext cx="402336" cy="402336"/>
+          </a:xfrm>
+          <a:prstGeom prst="rect">
+            <a:avLst/>
+          </a:prstGeom>
+          <a:noFill/>
+          <a:ln/>
+        </p:spPr>
+        <p:txBody>
+          <a:bodyPr wrap="square" lIns="0" tIns="0" rIns="0" bIns="0" rtlCol="0" anchor="ctr"/>
+          <a:lstStyle/>
+          <a:p>
+            <a:pPr algn="ctr" indent="0" marL="0">
+              <a:buNone/>
+            </a:pPr>
+            <a:r>
+              <a:rPr lang="en-US" sz="1400" b="1" dirty="0">
+                <a:solidFill>
+                  <a:srgbClr val="4E8EF7"/>
+                </a:solidFill>
+                <a:latin typeface="Arial" pitchFamily="34" charset="0"/>
+                <a:ea typeface="Arial" pitchFamily="34" charset="-122"/>
+                <a:cs typeface="Arial" pitchFamily="34" charset="-120"/>
+              </a:rPr>
+              <a:t>3</a:t>
+            </a:r>
+            <a:endParaRPr lang="en-US" sz="1400" dirty="0"/>
+          </a:p>
+        </p:txBody>
+      </p:sp>
+      <p:sp>
+        <p:nvSpPr>
+          <p:cNvPr id="17" name="Text 15"/>
+          <p:cNvSpPr/>
+          <p:nvPr/>
+        </p:nvSpPr>
+        <p:spPr>
+          <a:xfrm>
+            <a:off x="7040880" y="3941064"/>
+            <a:ext cx="3931920" cy="292608"/>
+          </a:xfrm>
+          <a:prstGeom prst="rect">
+            <a:avLst/>
+          </a:prstGeom>
+          <a:noFill/>
+          <a:ln/>
+        </p:spPr>
+        <p:txBody>
+          <a:bodyPr wrap="square" lIns="0" tIns="0" rIns="0" bIns="0" rtlCol="0" anchor="ctr"/>
+          <a:lstStyle/>
+          <a:p>
+            <a:pPr rtl="1" algn="r" indent="0" marL="0">
+              <a:buNone/>
+            </a:pPr>
+            <a:r>
+              <a:rPr lang="en-US" sz="1500" b="1" dirty="0">
+                <a:solidFill>
+                  <a:srgbClr val="E9EDF3"/>
+                </a:solidFill>
+                <a:latin typeface="Arial" pitchFamily="34" charset="0"/>
+                <a:ea typeface="Arial" pitchFamily="34" charset="-122"/>
+                <a:cs typeface="Arial" pitchFamily="34" charset="-120"/>
+              </a:rPr>
+              <a:t>אפס מספרים מומצאים</a:t>
+            </a:r>
+            <a:endParaRPr lang="en-US" sz="1500" dirty="0"/>
+          </a:p>
+        </p:txBody>
+      </p:sp>
+      <p:sp>
+        <p:nvSpPr>
+          <p:cNvPr id="18" name="Text 16"/>
+          <p:cNvSpPr/>
+          <p:nvPr/>
+        </p:nvSpPr>
+        <p:spPr>
+          <a:xfrm>
+            <a:off x="7040880" y="4270248"/>
+            <a:ext cx="3931920" cy="548640"/>
+          </a:xfrm>
+          <a:prstGeom prst="rect">
+            <a:avLst/>
+          </a:prstGeom>
+          <a:noFill/>
+          <a:ln/>
+        </p:spPr>
+        <p:txBody>
+          <a:bodyPr wrap="square" lIns="0" tIns="0" rIns="0" bIns="0" rtlCol="0" anchor="t"/>
+          <a:lstStyle/>
+          <a:p>
+            <a:pPr rtl="1" algn="r" indent="0" marL="0">
+              <a:lnSpc>
+                <a:spcPts val="1800"/>
+              </a:lnSpc>
+              <a:buNone/>
+            </a:pPr>
+            <a:r>
+              <a:rPr lang="en-US" sz="1250" dirty="0">
+                <a:solidFill>
+                  <a:srgbClr val="A4AEBE"/>
+                </a:solidFill>
+                <a:latin typeface="Calibri" pitchFamily="34" charset="0"/>
+                <a:ea typeface="Calibri" pitchFamily="34" charset="-122"/>
+                <a:cs typeface="Calibri" pitchFamily="34" charset="-120"/>
+              </a:rPr>
+              <a:t>כל תשובה מגיעה מפונקציה טהורה עם בדיקה מאחוריה — מודל שפה לא מנסח כאן דבר</a:t>
+            </a:r>
+            <a:endParaRPr lang="en-US" sz="1250" dirty="0"/>
+          </a:p>
+        </p:txBody>
+      </p:sp>
+      <p:sp>
+        <p:nvSpPr>
+          <p:cNvPr id="19" name="Shape 17"/>
+          <p:cNvSpPr/>
+          <p:nvPr/>
+        </p:nvSpPr>
+        <p:spPr>
+          <a:xfrm>
+            <a:off x="11119104" y="4946904"/>
+            <a:ext cx="402336" cy="402336"/>
+          </a:xfrm>
+          <a:prstGeom prst="ellipse">
+            <a:avLst/>
+          </a:prstGeom>
+          <a:solidFill>
+            <a:srgbClr val="16233A"/>
+          </a:solidFill>
+          <a:ln w="12700">
+            <a:solidFill>
+              <a:srgbClr val="4E8EF7"/>
+            </a:solidFill>
+            <a:prstDash val="solid"/>
+          </a:ln>
+        </p:spPr>
+      </p:sp>
+      <p:sp>
+        <p:nvSpPr>
+          <p:cNvPr id="20" name="Text 18"/>
+          <p:cNvSpPr/>
+          <p:nvPr/>
+        </p:nvSpPr>
+        <p:spPr>
+          <a:xfrm>
+            <a:off x="11119104" y="4946904"/>
+            <a:ext cx="402336" cy="402336"/>
+          </a:xfrm>
+          <a:prstGeom prst="rect">
+            <a:avLst/>
+          </a:prstGeom>
+          <a:noFill/>
+          <a:ln/>
+        </p:spPr>
+        <p:txBody>
+          <a:bodyPr wrap="square" lIns="0" tIns="0" rIns="0" bIns="0" rtlCol="0" anchor="ctr"/>
+          <a:lstStyle/>
+          <a:p>
+            <a:pPr algn="ctr" indent="0" marL="0">
+              <a:buNone/>
+            </a:pPr>
+            <a:r>
+              <a:rPr lang="en-US" sz="1400" b="1" dirty="0">
+                <a:solidFill>
+                  <a:srgbClr val="4E8EF7"/>
+                </a:solidFill>
+                <a:latin typeface="Arial" pitchFamily="34" charset="0"/>
+                <a:ea typeface="Arial" pitchFamily="34" charset="-122"/>
+                <a:cs typeface="Arial" pitchFamily="34" charset="-120"/>
+              </a:rPr>
+              <a:t>4</a:t>
+            </a:r>
+            <a:endParaRPr lang="en-US" sz="1400" dirty="0"/>
+          </a:p>
+        </p:txBody>
+      </p:sp>
+      <p:sp>
+        <p:nvSpPr>
+          <p:cNvPr id="21" name="Text 19"/>
+          <p:cNvSpPr/>
+          <p:nvPr/>
+        </p:nvSpPr>
+        <p:spPr>
+          <a:xfrm>
+            <a:off x="7040880" y="4928616"/>
+            <a:ext cx="3931920" cy="292608"/>
+          </a:xfrm>
+          <a:prstGeom prst="rect">
+            <a:avLst/>
+          </a:prstGeom>
+          <a:noFill/>
+          <a:ln/>
+        </p:spPr>
+        <p:txBody>
+          <a:bodyPr wrap="square" lIns="0" tIns="0" rIns="0" bIns="0" rtlCol="0" anchor="ctr"/>
+          <a:lstStyle/>
+          <a:p>
+            <a:pPr rtl="1" algn="r" indent="0" marL="0">
+              <a:buNone/>
+            </a:pPr>
+            <a:r>
+              <a:rPr lang="en-US" sz="1500" b="1" dirty="0">
+                <a:solidFill>
+                  <a:srgbClr val="E9EDF3"/>
+                </a:solidFill>
+                <a:latin typeface="Arial" pitchFamily="34" charset="0"/>
+                <a:ea typeface="Arial" pitchFamily="34" charset="-122"/>
+                <a:cs typeface="Arial" pitchFamily="34" charset="-120"/>
+              </a:rPr>
+              <a:t>ואם אין מספיק נתונים</a:t>
+            </a:r>
+            <a:endParaRPr lang="en-US" sz="1500" dirty="0"/>
+          </a:p>
+        </p:txBody>
+      </p:sp>
+      <p:sp>
+        <p:nvSpPr>
+          <p:cNvPr id="22" name="Text 20"/>
+          <p:cNvSpPr/>
+          <p:nvPr/>
+        </p:nvSpPr>
+        <p:spPr>
+          <a:xfrm>
+            <a:off x="7040880" y="5257800"/>
+            <a:ext cx="3931920" cy="548640"/>
+          </a:xfrm>
+          <a:prstGeom prst="rect">
+            <a:avLst/>
+          </a:prstGeom>
+          <a:noFill/>
+          <a:ln/>
+        </p:spPr>
+        <p:txBody>
+          <a:bodyPr wrap="square" lIns="0" tIns="0" rIns="0" bIns="0" rtlCol="0" anchor="t"/>
+          <a:lstStyle/>
+          <a:p>
+            <a:pPr rtl="1" algn="r" indent="0" marL="0">
+              <a:lnSpc>
+                <a:spcPts val="1800"/>
+              </a:lnSpc>
+              <a:buNone/>
+            </a:pPr>
+            <a:r>
+              <a:rPr lang="en-US" sz="1250" dirty="0">
+                <a:solidFill>
+                  <a:srgbClr val="A4AEBE"/>
+                </a:solidFill>
+                <a:latin typeface="Calibri" pitchFamily="34" charset="0"/>
+                <a:ea typeface="Calibri" pitchFamily="34" charset="-122"/>
+                <a:cs typeface="Calibri" pitchFamily="34" charset="-120"/>
+              </a:rPr>
+              <a:t>השאלה אומרת זאת ומסבירה מה חסר, במקום להחזיר מספר בטוח משתי ריצות</a:t>
+            </a:r>
+            <a:endParaRPr lang="en-US" sz="1250" dirty="0"/>
+          </a:p>
+        </p:txBody>
+      </p:sp>
+      <p:pic>
+        <p:nvPicPr>
+          <p:cNvPr id="407" name="Screenshot 8"/>
+          <p:cNvPicPr>
+            <a:picLocks noChangeAspect="1"/>
+          </p:cNvPicPr>
+          <p:nvPr/>
+        </p:nvPicPr>
+        <p:blipFill>
+          <a:blip r:embed="rIdShot8"/>
+          <a:stretch>
+            <a:fillRect/>
+          </a:stretch>
+        </p:blipFill>
+        <p:spPr>
+          <a:xfrm>
+            <a:off x="640080" y="1874520"/>
+            <a:ext cx="5657088" cy="3977640"/>
+          </a:xfrm>
+          <a:prstGeom prst="roundRect">
+            <a:avLst>
+              <a:gd name="adj" fmla="val 2299"/>
+            </a:avLst>
+          </a:prstGeom>
+          <a:ln w="12700">
+            <a:solidFill>
+              <a:srgbClr val="242A34"/>
+            </a:solidFill>
+          </a:ln>
+        </p:spPr>
+      </p:pic>
+    </p:spTree>
+  </p:cSld>
+  <p:clrMapOvr>
+    <a:masterClrMapping/>
+  </p:clrMapOvr>
+</p:sld>
+</file>
+
 <file path=ppt/slides/slide2.xml><?xml version="1.0" encoding="utf-8"?>
 <p:sld xmlns:a="http://schemas.openxmlformats.org/drawingml/2006/main" xmlns:r="http://schemas.openxmlformats.org/officeDocument/2006/relationships" xmlns:p="http://schemas.openxmlformats.org/presentationml/2006/main">
   <p:cSld name="Slide 2">
@@ -8773,12 +9534,20 @@
           </a:p>
         </p:txBody>
       </p:sp>
-      <p:sp>
-        <p:nvSpPr>
-          <p:cNvPr id="4" name="Shape 2"/>
-          <p:cNvSpPr/>
-          <p:nvPr/>
-        </p:nvSpPr>
+      <p:pic>
+        <p:nvPicPr>
+          <p:cNvPr id="405" name="Screenshot 5"/>
+          <p:cNvPicPr>
+            <a:picLocks noChangeAspect="1"/>
+          </p:cNvPicPr>
+          <p:nvPr/>
+        </p:nvPicPr>
+        <p:blipFill>
+          <a:blip r:embed="rIdShot5"/>
+          <a:stretch>
+            <a:fillRect/>
+          </a:stretch>
+        </p:blipFill>
         <p:spPr>
           <a:xfrm>
             <a:off x="640080" y="1874520"/>
@@ -8789,27 +9558,23 @@
               <a:gd name="adj" fmla="val 2299"/>
             </a:avLst>
           </a:prstGeom>
-          <a:solidFill>
-            <a:srgbClr val="1B1F27"/>
-          </a:solidFill>
           <a:ln w="12700">
             <a:solidFill>
-              <a:srgbClr val="364050"/>
+              <a:srgbClr val="242A34"/>
             </a:solidFill>
-            <a:prstDash val="dash"/>
           </a:ln>
         </p:spPr>
-      </p:sp>
-      <p:sp>
-        <p:nvSpPr>
-          <p:cNvPr id="5" name="Text 3"/>
-          <p:cNvSpPr/>
-          <p:nvPr/>
-        </p:nvSpPr>
-        <p:spPr>
-          <a:xfrm>
-            <a:off x="640080" y="3451860"/>
-            <a:ext cx="6035040" cy="320040"/>
+      </p:pic>
+      <p:sp>
+        <p:nvSpPr>
+          <p:cNvPr id="6" name="Text 4"/>
+          <p:cNvSpPr/>
+          <p:nvPr/>
+        </p:nvSpPr>
+        <p:spPr>
+          <a:xfrm>
+            <a:off x="640080" y="5943600"/>
+            <a:ext cx="6035040" cy="365760"/>
           </a:xfrm>
           <a:prstGeom prst="rect">
             <a:avLst/>
@@ -8825,48 +9590,9 @@
               <a:buNone/>
             </a:pPr>
             <a:r>
-              <a:rPr lang="en-US" sz="1300" dirty="0">
+              <a:rPr lang="en-US" sz="1100" dirty="0">
                 <a:solidFill>
                   <a:srgbClr val="8792A3"/>
-                </a:solidFill>
-                <a:latin typeface="Calibri" pitchFamily="34" charset="0"/>
-                <a:ea typeface="Calibri" pitchFamily="34" charset="-122"/>
-                <a:cs typeface="Calibri" pitchFamily="34" charset="-120"/>
-              </a:rPr>
-              <a:t>צילום מסך</a:t>
-            </a:r>
-            <a:endParaRPr lang="en-US" sz="1300" dirty="0"/>
-          </a:p>
-        </p:txBody>
-      </p:sp>
-      <p:sp>
-        <p:nvSpPr>
-          <p:cNvPr id="6" name="Text 4"/>
-          <p:cNvSpPr/>
-          <p:nvPr/>
-        </p:nvSpPr>
-        <p:spPr>
-          <a:xfrm>
-            <a:off x="868680" y="3817620"/>
-            <a:ext cx="5577840" cy="548640"/>
-          </a:xfrm>
-          <a:prstGeom prst="rect">
-            <a:avLst/>
-          </a:prstGeom>
-          <a:noFill/>
-          <a:ln/>
-        </p:spPr>
-        <p:txBody>
-          <a:bodyPr wrap="square" lIns="0" tIns="0" rIns="0" bIns="0" rtlCol="0" anchor="ctr"/>
-          <a:lstStyle/>
-          <a:p>
-            <a:pPr rtl="1" algn="ctr" indent="0" marL="0">
-              <a:buNone/>
-            </a:pPr>
-            <a:r>
-              <a:rPr lang="en-US" sz="1100" dirty="0">
-                <a:solidFill>
-                  <a:srgbClr val="364050"/>
                 </a:solidFill>
                 <a:latin typeface="Calibri" pitchFamily="34" charset="0"/>
                 <a:ea typeface="Calibri" pitchFamily="34" charset="-122"/>
@@ -9568,12 +10294,20 @@
           </a:p>
         </p:txBody>
       </p:sp>
-      <p:sp>
-        <p:nvSpPr>
-          <p:cNvPr id="4" name="Shape 2"/>
-          <p:cNvSpPr/>
-          <p:nvPr/>
-        </p:nvSpPr>
+      <p:pic>
+        <p:nvPicPr>
+          <p:cNvPr id="406" name="Screenshot 6"/>
+          <p:cNvPicPr>
+            <a:picLocks noChangeAspect="1"/>
+          </p:cNvPicPr>
+          <p:nvPr/>
+        </p:nvPicPr>
+        <p:blipFill>
+          <a:blip r:embed="rIdShot6"/>
+          <a:stretch>
+            <a:fillRect/>
+          </a:stretch>
+        </p:blipFill>
         <p:spPr>
           <a:xfrm>
             <a:off x="640080" y="1874520"/>
@@ -9584,27 +10318,23 @@
               <a:gd name="adj" fmla="val 2299"/>
             </a:avLst>
           </a:prstGeom>
-          <a:solidFill>
-            <a:srgbClr val="1B1F27"/>
-          </a:solidFill>
           <a:ln w="12700">
             <a:solidFill>
-              <a:srgbClr val="364050"/>
+              <a:srgbClr val="242A34"/>
             </a:solidFill>
-            <a:prstDash val="dash"/>
           </a:ln>
         </p:spPr>
-      </p:sp>
-      <p:sp>
-        <p:nvSpPr>
-          <p:cNvPr id="5" name="Text 3"/>
-          <p:cNvSpPr/>
-          <p:nvPr/>
-        </p:nvSpPr>
-        <p:spPr>
-          <a:xfrm>
-            <a:off x="640080" y="3451860"/>
-            <a:ext cx="6035040" cy="320040"/>
+      </p:pic>
+      <p:sp>
+        <p:nvSpPr>
+          <p:cNvPr id="6" name="Text 4"/>
+          <p:cNvSpPr/>
+          <p:nvPr/>
+        </p:nvSpPr>
+        <p:spPr>
+          <a:xfrm>
+            <a:off x="640080" y="5943600"/>
+            <a:ext cx="6035040" cy="365760"/>
           </a:xfrm>
           <a:prstGeom prst="rect">
             <a:avLst/>
@@ -9620,48 +10350,9 @@
               <a:buNone/>
             </a:pPr>
             <a:r>
-              <a:rPr lang="en-US" sz="1300" dirty="0">
+              <a:rPr lang="en-US" sz="1100" dirty="0">
                 <a:solidFill>
                   <a:srgbClr val="8792A3"/>
-                </a:solidFill>
-                <a:latin typeface="Calibri" pitchFamily="34" charset="0"/>
-                <a:ea typeface="Calibri" pitchFamily="34" charset="-122"/>
-                <a:cs typeface="Calibri" pitchFamily="34" charset="-120"/>
-              </a:rPr>
-              <a:t>צילום מסך</a:t>
-            </a:r>
-            <a:endParaRPr lang="en-US" sz="1300" dirty="0"/>
-          </a:p>
-        </p:txBody>
-      </p:sp>
-      <p:sp>
-        <p:nvSpPr>
-          <p:cNvPr id="6" name="Text 4"/>
-          <p:cNvSpPr/>
-          <p:nvPr/>
-        </p:nvSpPr>
-        <p:spPr>
-          <a:xfrm>
-            <a:off x="868680" y="3817620"/>
-            <a:ext cx="5577840" cy="548640"/>
-          </a:xfrm>
-          <a:prstGeom prst="rect">
-            <a:avLst/>
-          </a:prstGeom>
-          <a:noFill/>
-          <a:ln/>
-        </p:spPr>
-        <p:txBody>
-          <a:bodyPr wrap="square" lIns="0" tIns="0" rIns="0" bIns="0" rtlCol="0" anchor="ctr"/>
-          <a:lstStyle/>
-          <a:p>
-            <a:pPr rtl="1" algn="ctr" indent="0" marL="0">
-              <a:buNone/>
-            </a:pPr>
-            <a:r>
-              <a:rPr lang="en-US" sz="1100" dirty="0">
-                <a:solidFill>
-                  <a:srgbClr val="364050"/>
                 </a:solidFill>
                 <a:latin typeface="Calibri" pitchFamily="34" charset="0"/>
                 <a:ea typeface="Calibri" pitchFamily="34" charset="-122"/>
@@ -10365,41 +11056,14 @@
       </p:sp>
       <p:sp>
         <p:nvSpPr>
-          <p:cNvPr id="4" name="Shape 2"/>
-          <p:cNvSpPr/>
-          <p:nvPr/>
-        </p:nvSpPr>
-        <p:spPr>
-          <a:xfrm>
-            <a:off x="640080" y="1874520"/>
-            <a:ext cx="6035040" cy="3977640"/>
-          </a:xfrm>
-          <a:prstGeom prst="roundRect">
-            <a:avLst>
-              <a:gd name="adj" fmla="val 2299"/>
-            </a:avLst>
-          </a:prstGeom>
-          <a:solidFill>
-            <a:srgbClr val="1B1F27"/>
-          </a:solidFill>
-          <a:ln w="12700">
-            <a:solidFill>
-              <a:srgbClr val="364050"/>
-            </a:solidFill>
-            <a:prstDash val="dash"/>
-          </a:ln>
-        </p:spPr>
-      </p:sp>
-      <p:sp>
-        <p:nvSpPr>
-          <p:cNvPr id="5" name="Text 3"/>
-          <p:cNvSpPr/>
-          <p:nvPr/>
-        </p:nvSpPr>
-        <p:spPr>
-          <a:xfrm>
-            <a:off x="640080" y="3451860"/>
-            <a:ext cx="6035040" cy="320040"/>
+          <p:cNvPr id="6" name="Text 4"/>
+          <p:cNvSpPr/>
+          <p:nvPr/>
+        </p:nvSpPr>
+        <p:spPr>
+          <a:xfrm>
+            <a:off x="640080" y="5943600"/>
+            <a:ext cx="5657088" cy="365760"/>
           </a:xfrm>
           <a:prstGeom prst="rect">
             <a:avLst/>
@@ -10415,48 +11079,9 @@
               <a:buNone/>
             </a:pPr>
             <a:r>
-              <a:rPr lang="en-US" sz="1300" dirty="0">
+              <a:rPr lang="en-US" sz="1100" dirty="0">
                 <a:solidFill>
                   <a:srgbClr val="8792A3"/>
-                </a:solidFill>
-                <a:latin typeface="Calibri" pitchFamily="34" charset="0"/>
-                <a:ea typeface="Calibri" pitchFamily="34" charset="-122"/>
-                <a:cs typeface="Calibri" pitchFamily="34" charset="-120"/>
-              </a:rPr>
-              <a:t>צילום מסך</a:t>
-            </a:r>
-            <a:endParaRPr lang="en-US" sz="1300" dirty="0"/>
-          </a:p>
-        </p:txBody>
-      </p:sp>
-      <p:sp>
-        <p:nvSpPr>
-          <p:cNvPr id="6" name="Text 4"/>
-          <p:cNvSpPr/>
-          <p:nvPr/>
-        </p:nvSpPr>
-        <p:spPr>
-          <a:xfrm>
-            <a:off x="868680" y="3817620"/>
-            <a:ext cx="5577840" cy="548640"/>
-          </a:xfrm>
-          <a:prstGeom prst="rect">
-            <a:avLst/>
-          </a:prstGeom>
-          <a:noFill/>
-          <a:ln/>
-        </p:spPr>
-        <p:txBody>
-          <a:bodyPr wrap="square" lIns="0" tIns="0" rIns="0" bIns="0" rtlCol="0" anchor="ctr"/>
-          <a:lstStyle/>
-          <a:p>
-            <a:pPr rtl="1" algn="ctr" indent="0" marL="0">
-              <a:buNone/>
-            </a:pPr>
-            <a:r>
-              <a:rPr lang="en-US" sz="1100" dirty="0">
-                <a:solidFill>
-                  <a:srgbClr val="364050"/>
                 </a:solidFill>
                 <a:latin typeface="Calibri" pitchFamily="34" charset="0"/>
                 <a:ea typeface="Calibri" pitchFamily="34" charset="-122"/>
@@ -11048,6 +11673,37 @@
           </a:p>
         </p:txBody>
       </p:sp>
+      <p:pic>
+        <p:nvPicPr>
+          <p:cNvPr id="407" name="Screenshot 7"/>
+          <p:cNvPicPr>
+            <a:picLocks noChangeAspect="1"/>
+          </p:cNvPicPr>
+          <p:nvPr/>
+        </p:nvPicPr>
+        <p:blipFill>
+          <a:blip r:embed="rIdShot7"/>
+          <a:stretch>
+            <a:fillRect/>
+          </a:stretch>
+        </p:blipFill>
+        <p:spPr>
+          <a:xfrm>
+            <a:off x="640080" y="1874520"/>
+            <a:ext cx="5657088" cy="3977640"/>
+          </a:xfrm>
+          <a:prstGeom prst="roundRect">
+            <a:avLst>
+              <a:gd name="adj" fmla="val 2299"/>
+            </a:avLst>
+          </a:prstGeom>
+          <a:ln w="12700">
+            <a:solidFill>
+              <a:srgbClr val="242A34"/>
+            </a:solidFill>
+          </a:ln>
+        </p:spPr>
+      </p:pic>
     </p:spTree>
   </p:cSld>
   <p:clrMapOvr>
@@ -12102,7 +12758,7 @@
                 <a:ea typeface="Arial" pitchFamily="34" charset="-122"/>
                 <a:cs typeface="Arial" pitchFamily="34" charset="-120"/>
               </a:rPr>
-              <a:t>15</a:t>
+              <a:t>19</a:t>
             </a:r>
             <a:endParaRPr lang="en-US" sz="3800" dirty="0"/>
           </a:p>
